--- a/AIT204_RNN_Presentation.pptx
+++ b/AIT204_RNN_Presentation.pptx
@@ -5,17 +5,17 @@
     <p:sldMasterId id="2147483648" r:id="rId1"/>
   </p:sldMasterIdLst>
   <p:sldIdLst>
-    <p:sldId id="256" r:id="rId7"/>
-    <p:sldId id="257" r:id="rId8"/>
-    <p:sldId id="258" r:id="rId9"/>
-    <p:sldId id="259" r:id="rId10"/>
-    <p:sldId id="260" r:id="rId11"/>
-    <p:sldId id="261" r:id="rId12"/>
-    <p:sldId id="262" r:id="rId13"/>
-    <p:sldId id="263" r:id="rId14"/>
-    <p:sldId id="264" r:id="rId15"/>
+    <p:sldId id="256" r:id="rId2"/>
+    <p:sldId id="257" r:id="rId3"/>
+    <p:sldId id="258" r:id="rId4"/>
+    <p:sldId id="259" r:id="rId5"/>
+    <p:sldId id="260" r:id="rId6"/>
+    <p:sldId id="261" r:id="rId7"/>
+    <p:sldId id="262" r:id="rId8"/>
+    <p:sldId id="263" r:id="rId9"/>
+    <p:sldId id="264" r:id="rId10"/>
   </p:sldIdLst>
-  <p:sldSz cx="12188952" cy="6858000" type="screen4x3"/>
+  <p:sldSz cx="12188825" cy="6858000"/>
   <p:notesSz cx="6858000" cy="9144000"/>
   <p:defaultTextStyle>
     <a:defPPr>
@@ -112,6 +112,22 @@
       </a:defRPr>
     </a:lvl9pPr>
   </p:defaultTextStyle>
+  <p:extLst>
+    <p:ext uri="{EFAFB233-063F-42B5-8137-9DF3F51BA10A}">
+      <p15:sldGuideLst xmlns:p15="http://schemas.microsoft.com/office/powerpoint/2012/main">
+        <p15:guide id="1" orient="horz" pos="2160">
+          <p15:clr>
+            <a:srgbClr val="A4A3A4"/>
+          </p15:clr>
+        </p15:guide>
+        <p15:guide id="2" pos="2880">
+          <p15:clr>
+            <a:srgbClr val="A4A3A4"/>
+          </p15:clr>
+        </p15:guide>
+      </p15:sldGuideLst>
+    </p:ext>
+  </p:extLst>
 </p:presentation>
 </file>
 
@@ -153,10 +169,9 @@
           <a:lstStyle/>
           <a:p>
             <a:r>
-              <a:rPr lang="en-US" smtClean="0"/>
+              <a:rPr lang="en-US"/>
               <a:t>Click to edit Master title style</a:t>
             </a:r>
-            <a:endParaRPr lang="en-US"/>
           </a:p>
         </p:txBody>
       </p:sp>
@@ -272,10 +287,9 @@
           </a:lstStyle>
           <a:p>
             <a:r>
-              <a:rPr lang="en-US" smtClean="0"/>
+              <a:rPr lang="en-US"/>
               <a:t>Click to edit Master subtitle style</a:t>
             </a:r>
-            <a:endParaRPr lang="en-US"/>
           </a:p>
         </p:txBody>
       </p:sp>
@@ -296,7 +310,7 @@
           <a:p>
             <a:fld id="{5BCAD085-E8A6-8845-BD4E-CB4CCA059FC4}" type="datetimeFigureOut">
               <a:rPr lang="en-US" smtClean="0"/>
-              <a:t>1/27/13</a:t>
+              <a:t>3/19/2026</a:t>
             </a:fld>
             <a:endParaRPr lang="en-US"/>
           </a:p>
@@ -390,10 +404,9 @@
           <a:lstStyle/>
           <a:p>
             <a:r>
-              <a:rPr lang="en-US" smtClean="0"/>
+              <a:rPr lang="en-US"/>
               <a:t>Click to edit Master title style</a:t>
             </a:r>
-            <a:endParaRPr lang="en-US"/>
           </a:p>
         </p:txBody>
       </p:sp>
@@ -414,38 +427,37 @@
           <a:p>
             <a:pPr lvl="0"/>
             <a:r>
-              <a:rPr lang="en-US" smtClean="0"/>
+              <a:rPr lang="en-US"/>
               <a:t>Click to edit Master text styles</a:t>
             </a:r>
           </a:p>
           <a:p>
             <a:pPr lvl="1"/>
             <a:r>
-              <a:rPr lang="en-US" smtClean="0"/>
+              <a:rPr lang="en-US"/>
               <a:t>Second level</a:t>
             </a:r>
           </a:p>
           <a:p>
             <a:pPr lvl="2"/>
             <a:r>
-              <a:rPr lang="en-US" smtClean="0"/>
+              <a:rPr lang="en-US"/>
               <a:t>Third level</a:t>
             </a:r>
           </a:p>
           <a:p>
             <a:pPr lvl="3"/>
             <a:r>
-              <a:rPr lang="en-US" smtClean="0"/>
+              <a:rPr lang="en-US"/>
               <a:t>Fourth level</a:t>
             </a:r>
           </a:p>
           <a:p>
             <a:pPr lvl="4"/>
             <a:r>
-              <a:rPr lang="en-US" smtClean="0"/>
+              <a:rPr lang="en-US"/>
               <a:t>Fifth level</a:t>
             </a:r>
-            <a:endParaRPr lang="en-US"/>
           </a:p>
         </p:txBody>
       </p:sp>
@@ -466,7 +478,7 @@
           <a:p>
             <a:fld id="{5BCAD085-E8A6-8845-BD4E-CB4CCA059FC4}" type="datetimeFigureOut">
               <a:rPr lang="en-US" smtClean="0"/>
-              <a:t>1/27/13</a:t>
+              <a:t>3/19/2026</a:t>
             </a:fld>
             <a:endParaRPr lang="en-US"/>
           </a:p>
@@ -565,10 +577,9 @@
           <a:lstStyle/>
           <a:p>
             <a:r>
-              <a:rPr lang="en-US" smtClean="0"/>
+              <a:rPr lang="en-US"/>
               <a:t>Click to edit Master title style</a:t>
             </a:r>
-            <a:endParaRPr lang="en-US"/>
           </a:p>
         </p:txBody>
       </p:sp>
@@ -594,38 +605,37 @@
           <a:p>
             <a:pPr lvl="0"/>
             <a:r>
-              <a:rPr lang="en-US" smtClean="0"/>
+              <a:rPr lang="en-US"/>
               <a:t>Click to edit Master text styles</a:t>
             </a:r>
           </a:p>
           <a:p>
             <a:pPr lvl="1"/>
             <a:r>
-              <a:rPr lang="en-US" smtClean="0"/>
+              <a:rPr lang="en-US"/>
               <a:t>Second level</a:t>
             </a:r>
           </a:p>
           <a:p>
             <a:pPr lvl="2"/>
             <a:r>
-              <a:rPr lang="en-US" smtClean="0"/>
+              <a:rPr lang="en-US"/>
               <a:t>Third level</a:t>
             </a:r>
           </a:p>
           <a:p>
             <a:pPr lvl="3"/>
             <a:r>
-              <a:rPr lang="en-US" smtClean="0"/>
+              <a:rPr lang="en-US"/>
               <a:t>Fourth level</a:t>
             </a:r>
           </a:p>
           <a:p>
             <a:pPr lvl="4"/>
             <a:r>
-              <a:rPr lang="en-US" smtClean="0"/>
+              <a:rPr lang="en-US"/>
               <a:t>Fifth level</a:t>
             </a:r>
-            <a:endParaRPr lang="en-US"/>
           </a:p>
         </p:txBody>
       </p:sp>
@@ -646,7 +656,7 @@
           <a:p>
             <a:fld id="{5BCAD085-E8A6-8845-BD4E-CB4CCA059FC4}" type="datetimeFigureOut">
               <a:rPr lang="en-US" smtClean="0"/>
-              <a:t>1/27/13</a:t>
+              <a:t>3/19/2026</a:t>
             </a:fld>
             <a:endParaRPr lang="en-US"/>
           </a:p>
@@ -740,10 +750,9 @@
           <a:lstStyle/>
           <a:p>
             <a:r>
-              <a:rPr lang="en-US" smtClean="0"/>
+              <a:rPr lang="en-US"/>
               <a:t>Click to edit Master title style</a:t>
             </a:r>
-            <a:endParaRPr lang="en-US"/>
           </a:p>
         </p:txBody>
       </p:sp>
@@ -764,38 +773,37 @@
           <a:p>
             <a:pPr lvl="0"/>
             <a:r>
-              <a:rPr lang="en-US" smtClean="0"/>
+              <a:rPr lang="en-US"/>
               <a:t>Click to edit Master text styles</a:t>
             </a:r>
           </a:p>
           <a:p>
             <a:pPr lvl="1"/>
             <a:r>
-              <a:rPr lang="en-US" smtClean="0"/>
+              <a:rPr lang="en-US"/>
               <a:t>Second level</a:t>
             </a:r>
           </a:p>
           <a:p>
             <a:pPr lvl="2"/>
             <a:r>
-              <a:rPr lang="en-US" smtClean="0"/>
+              <a:rPr lang="en-US"/>
               <a:t>Third level</a:t>
             </a:r>
           </a:p>
           <a:p>
             <a:pPr lvl="3"/>
             <a:r>
-              <a:rPr lang="en-US" smtClean="0"/>
+              <a:rPr lang="en-US"/>
               <a:t>Fourth level</a:t>
             </a:r>
           </a:p>
           <a:p>
             <a:pPr lvl="4"/>
             <a:r>
-              <a:rPr lang="en-US" smtClean="0"/>
+              <a:rPr lang="en-US"/>
               <a:t>Fifth level</a:t>
             </a:r>
-            <a:endParaRPr lang="en-US"/>
           </a:p>
         </p:txBody>
       </p:sp>
@@ -816,7 +824,7 @@
           <a:p>
             <a:fld id="{5BCAD085-E8A6-8845-BD4E-CB4CCA059FC4}" type="datetimeFigureOut">
               <a:rPr lang="en-US" smtClean="0"/>
-              <a:t>1/27/13</a:t>
+              <a:t>3/19/2026</a:t>
             </a:fld>
             <a:endParaRPr lang="en-US"/>
           </a:p>
@@ -919,10 +927,9 @@
           </a:lstStyle>
           <a:p>
             <a:r>
-              <a:rPr lang="en-US" smtClean="0"/>
+              <a:rPr lang="en-US"/>
               <a:t>Click to edit Master title style</a:t>
             </a:r>
-            <a:endParaRPr lang="en-US"/>
           </a:p>
         </p:txBody>
       </p:sp>
@@ -1039,7 +1046,7 @@
           <a:p>
             <a:pPr lvl="0"/>
             <a:r>
-              <a:rPr lang="en-US" smtClean="0"/>
+              <a:rPr lang="en-US"/>
               <a:t>Click to edit Master text styles</a:t>
             </a:r>
           </a:p>
@@ -1062,7 +1069,7 @@
           <a:p>
             <a:fld id="{5BCAD085-E8A6-8845-BD4E-CB4CCA059FC4}" type="datetimeFigureOut">
               <a:rPr lang="en-US" smtClean="0"/>
-              <a:t>1/27/13</a:t>
+              <a:t>3/19/2026</a:t>
             </a:fld>
             <a:endParaRPr lang="en-US"/>
           </a:p>
@@ -1156,10 +1163,9 @@
           <a:lstStyle/>
           <a:p>
             <a:r>
-              <a:rPr lang="en-US" smtClean="0"/>
+              <a:rPr lang="en-US"/>
               <a:t>Click to edit Master title style</a:t>
             </a:r>
-            <a:endParaRPr lang="en-US"/>
           </a:p>
         </p:txBody>
       </p:sp>
@@ -1213,38 +1219,37 @@
           <a:p>
             <a:pPr lvl="0"/>
             <a:r>
-              <a:rPr lang="en-US" smtClean="0"/>
+              <a:rPr lang="en-US"/>
               <a:t>Click to edit Master text styles</a:t>
             </a:r>
           </a:p>
           <a:p>
             <a:pPr lvl="1"/>
             <a:r>
-              <a:rPr lang="en-US" smtClean="0"/>
+              <a:rPr lang="en-US"/>
               <a:t>Second level</a:t>
             </a:r>
           </a:p>
           <a:p>
             <a:pPr lvl="2"/>
             <a:r>
-              <a:rPr lang="en-US" smtClean="0"/>
+              <a:rPr lang="en-US"/>
               <a:t>Third level</a:t>
             </a:r>
           </a:p>
           <a:p>
             <a:pPr lvl="3"/>
             <a:r>
-              <a:rPr lang="en-US" smtClean="0"/>
+              <a:rPr lang="en-US"/>
               <a:t>Fourth level</a:t>
             </a:r>
           </a:p>
           <a:p>
             <a:pPr lvl="4"/>
             <a:r>
-              <a:rPr lang="en-US" smtClean="0"/>
+              <a:rPr lang="en-US"/>
               <a:t>Fifth level</a:t>
             </a:r>
-            <a:endParaRPr lang="en-US"/>
           </a:p>
         </p:txBody>
       </p:sp>
@@ -1298,38 +1303,37 @@
           <a:p>
             <a:pPr lvl="0"/>
             <a:r>
-              <a:rPr lang="en-US" smtClean="0"/>
+              <a:rPr lang="en-US"/>
               <a:t>Click to edit Master text styles</a:t>
             </a:r>
           </a:p>
           <a:p>
             <a:pPr lvl="1"/>
             <a:r>
-              <a:rPr lang="en-US" smtClean="0"/>
+              <a:rPr lang="en-US"/>
               <a:t>Second level</a:t>
             </a:r>
           </a:p>
           <a:p>
             <a:pPr lvl="2"/>
             <a:r>
-              <a:rPr lang="en-US" smtClean="0"/>
+              <a:rPr lang="en-US"/>
               <a:t>Third level</a:t>
             </a:r>
           </a:p>
           <a:p>
             <a:pPr lvl="3"/>
             <a:r>
-              <a:rPr lang="en-US" smtClean="0"/>
+              <a:rPr lang="en-US"/>
               <a:t>Fourth level</a:t>
             </a:r>
           </a:p>
           <a:p>
             <a:pPr lvl="4"/>
             <a:r>
-              <a:rPr lang="en-US" smtClean="0"/>
+              <a:rPr lang="en-US"/>
               <a:t>Fifth level</a:t>
             </a:r>
-            <a:endParaRPr lang="en-US"/>
           </a:p>
         </p:txBody>
       </p:sp>
@@ -1350,7 +1354,7 @@
           <a:p>
             <a:fld id="{5BCAD085-E8A6-8845-BD4E-CB4CCA059FC4}" type="datetimeFigureOut">
               <a:rPr lang="en-US" smtClean="0"/>
-              <a:t>1/27/13</a:t>
+              <a:t>3/19/2026</a:t>
             </a:fld>
             <a:endParaRPr lang="en-US"/>
           </a:p>
@@ -1448,10 +1452,9 @@
           </a:lstStyle>
           <a:p>
             <a:r>
-              <a:rPr lang="en-US" smtClean="0"/>
+              <a:rPr lang="en-US"/>
               <a:t>Click to edit Master title style</a:t>
             </a:r>
-            <a:endParaRPr lang="en-US"/>
           </a:p>
         </p:txBody>
       </p:sp>
@@ -1514,7 +1517,7 @@
           <a:p>
             <a:pPr lvl="0"/>
             <a:r>
-              <a:rPr lang="en-US" smtClean="0"/>
+              <a:rPr lang="en-US"/>
               <a:t>Click to edit Master text styles</a:t>
             </a:r>
           </a:p>
@@ -1570,38 +1573,37 @@
           <a:p>
             <a:pPr lvl="0"/>
             <a:r>
-              <a:rPr lang="en-US" smtClean="0"/>
+              <a:rPr lang="en-US"/>
               <a:t>Click to edit Master text styles</a:t>
             </a:r>
           </a:p>
           <a:p>
             <a:pPr lvl="1"/>
             <a:r>
-              <a:rPr lang="en-US" smtClean="0"/>
+              <a:rPr lang="en-US"/>
               <a:t>Second level</a:t>
             </a:r>
           </a:p>
           <a:p>
             <a:pPr lvl="2"/>
             <a:r>
-              <a:rPr lang="en-US" smtClean="0"/>
+              <a:rPr lang="en-US"/>
               <a:t>Third level</a:t>
             </a:r>
           </a:p>
           <a:p>
             <a:pPr lvl="3"/>
             <a:r>
-              <a:rPr lang="en-US" smtClean="0"/>
+              <a:rPr lang="en-US"/>
               <a:t>Fourth level</a:t>
             </a:r>
           </a:p>
           <a:p>
             <a:pPr lvl="4"/>
             <a:r>
-              <a:rPr lang="en-US" smtClean="0"/>
+              <a:rPr lang="en-US"/>
               <a:t>Fifth level</a:t>
             </a:r>
-            <a:endParaRPr lang="en-US"/>
           </a:p>
         </p:txBody>
       </p:sp>
@@ -1664,7 +1666,7 @@
           <a:p>
             <a:pPr lvl="0"/>
             <a:r>
-              <a:rPr lang="en-US" smtClean="0"/>
+              <a:rPr lang="en-US"/>
               <a:t>Click to edit Master text styles</a:t>
             </a:r>
           </a:p>
@@ -1720,38 +1722,37 @@
           <a:p>
             <a:pPr lvl="0"/>
             <a:r>
-              <a:rPr lang="en-US" smtClean="0"/>
+              <a:rPr lang="en-US"/>
               <a:t>Click to edit Master text styles</a:t>
             </a:r>
           </a:p>
           <a:p>
             <a:pPr lvl="1"/>
             <a:r>
-              <a:rPr lang="en-US" smtClean="0"/>
+              <a:rPr lang="en-US"/>
               <a:t>Second level</a:t>
             </a:r>
           </a:p>
           <a:p>
             <a:pPr lvl="2"/>
             <a:r>
-              <a:rPr lang="en-US" smtClean="0"/>
+              <a:rPr lang="en-US"/>
               <a:t>Third level</a:t>
             </a:r>
           </a:p>
           <a:p>
             <a:pPr lvl="3"/>
             <a:r>
-              <a:rPr lang="en-US" smtClean="0"/>
+              <a:rPr lang="en-US"/>
               <a:t>Fourth level</a:t>
             </a:r>
           </a:p>
           <a:p>
             <a:pPr lvl="4"/>
             <a:r>
-              <a:rPr lang="en-US" smtClean="0"/>
+              <a:rPr lang="en-US"/>
               <a:t>Fifth level</a:t>
             </a:r>
-            <a:endParaRPr lang="en-US"/>
           </a:p>
         </p:txBody>
       </p:sp>
@@ -1772,7 +1773,7 @@
           <a:p>
             <a:fld id="{5BCAD085-E8A6-8845-BD4E-CB4CCA059FC4}" type="datetimeFigureOut">
               <a:rPr lang="en-US" smtClean="0"/>
-              <a:t>1/27/13</a:t>
+              <a:t>3/19/2026</a:t>
             </a:fld>
             <a:endParaRPr lang="en-US"/>
           </a:p>
@@ -1866,10 +1867,9 @@
           <a:lstStyle/>
           <a:p>
             <a:r>
-              <a:rPr lang="en-US" smtClean="0"/>
+              <a:rPr lang="en-US"/>
               <a:t>Click to edit Master title style</a:t>
             </a:r>
-            <a:endParaRPr lang="en-US"/>
           </a:p>
         </p:txBody>
       </p:sp>
@@ -1890,7 +1890,7 @@
           <a:p>
             <a:fld id="{5BCAD085-E8A6-8845-BD4E-CB4CCA059FC4}" type="datetimeFigureOut">
               <a:rPr lang="en-US" smtClean="0"/>
-              <a:t>1/27/13</a:t>
+              <a:t>3/19/2026</a:t>
             </a:fld>
             <a:endParaRPr lang="en-US"/>
           </a:p>
@@ -1985,7 +1985,7 @@
           <a:p>
             <a:fld id="{5BCAD085-E8A6-8845-BD4E-CB4CCA059FC4}" type="datetimeFigureOut">
               <a:rPr lang="en-US" smtClean="0"/>
-              <a:t>1/27/13</a:t>
+              <a:t>3/19/2026</a:t>
             </a:fld>
             <a:endParaRPr lang="en-US"/>
           </a:p>
@@ -2088,10 +2088,9 @@
           </a:lstStyle>
           <a:p>
             <a:r>
-              <a:rPr lang="en-US" smtClean="0"/>
+              <a:rPr lang="en-US"/>
               <a:t>Click to edit Master title style</a:t>
             </a:r>
-            <a:endParaRPr lang="en-US"/>
           </a:p>
         </p:txBody>
       </p:sp>
@@ -2145,38 +2144,37 @@
           <a:p>
             <a:pPr lvl="0"/>
             <a:r>
-              <a:rPr lang="en-US" smtClean="0"/>
+              <a:rPr lang="en-US"/>
               <a:t>Click to edit Master text styles</a:t>
             </a:r>
           </a:p>
           <a:p>
             <a:pPr lvl="1"/>
             <a:r>
-              <a:rPr lang="en-US" smtClean="0"/>
+              <a:rPr lang="en-US"/>
               <a:t>Second level</a:t>
             </a:r>
           </a:p>
           <a:p>
             <a:pPr lvl="2"/>
             <a:r>
-              <a:rPr lang="en-US" smtClean="0"/>
+              <a:rPr lang="en-US"/>
               <a:t>Third level</a:t>
             </a:r>
           </a:p>
           <a:p>
             <a:pPr lvl="3"/>
             <a:r>
-              <a:rPr lang="en-US" smtClean="0"/>
+              <a:rPr lang="en-US"/>
               <a:t>Fourth level</a:t>
             </a:r>
           </a:p>
           <a:p>
             <a:pPr lvl="4"/>
             <a:r>
-              <a:rPr lang="en-US" smtClean="0"/>
+              <a:rPr lang="en-US"/>
               <a:t>Fifth level</a:t>
             </a:r>
-            <a:endParaRPr lang="en-US"/>
           </a:p>
         </p:txBody>
       </p:sp>
@@ -2239,7 +2237,7 @@
           <a:p>
             <a:pPr lvl="0"/>
             <a:r>
-              <a:rPr lang="en-US" smtClean="0"/>
+              <a:rPr lang="en-US"/>
               <a:t>Click to edit Master text styles</a:t>
             </a:r>
           </a:p>
@@ -2262,7 +2260,7 @@
           <a:p>
             <a:fld id="{5BCAD085-E8A6-8845-BD4E-CB4CCA059FC4}" type="datetimeFigureOut">
               <a:rPr lang="en-US" smtClean="0"/>
-              <a:t>1/27/13</a:t>
+              <a:t>3/19/2026</a:t>
             </a:fld>
             <a:endParaRPr lang="en-US"/>
           </a:p>
@@ -2365,10 +2363,9 @@
           </a:lstStyle>
           <a:p>
             <a:r>
-              <a:rPr lang="en-US" smtClean="0"/>
+              <a:rPr lang="en-US"/>
               <a:t>Click to edit Master title style</a:t>
             </a:r>
-            <a:endParaRPr lang="en-US"/>
           </a:p>
         </p:txBody>
       </p:sp>
@@ -2492,7 +2489,7 @@
           <a:p>
             <a:pPr lvl="0"/>
             <a:r>
-              <a:rPr lang="en-US" smtClean="0"/>
+              <a:rPr lang="en-US"/>
               <a:t>Click to edit Master text styles</a:t>
             </a:r>
           </a:p>
@@ -2515,7 +2512,7 @@
           <a:p>
             <a:fld id="{5BCAD085-E8A6-8845-BD4E-CB4CCA059FC4}" type="datetimeFigureOut">
               <a:rPr lang="en-US" smtClean="0"/>
-              <a:t>1/27/13</a:t>
+              <a:t>3/19/2026</a:t>
             </a:fld>
             <a:endParaRPr lang="en-US"/>
           </a:p>
@@ -2624,10 +2621,9 @@
           <a:lstStyle/>
           <a:p>
             <a:r>
-              <a:rPr lang="en-US" smtClean="0"/>
+              <a:rPr lang="en-US"/>
               <a:t>Click to edit Master title style</a:t>
             </a:r>
-            <a:endParaRPr lang="en-US"/>
           </a:p>
         </p:txBody>
       </p:sp>
@@ -2658,38 +2654,37 @@
           <a:p>
             <a:pPr lvl="0"/>
             <a:r>
-              <a:rPr lang="en-US" smtClean="0"/>
+              <a:rPr lang="en-US"/>
               <a:t>Click to edit Master text styles</a:t>
             </a:r>
           </a:p>
           <a:p>
             <a:pPr lvl="1"/>
             <a:r>
-              <a:rPr lang="en-US" smtClean="0"/>
+              <a:rPr lang="en-US"/>
               <a:t>Second level</a:t>
             </a:r>
           </a:p>
           <a:p>
             <a:pPr lvl="2"/>
             <a:r>
-              <a:rPr lang="en-US" smtClean="0"/>
+              <a:rPr lang="en-US"/>
               <a:t>Third level</a:t>
             </a:r>
           </a:p>
           <a:p>
             <a:pPr lvl="3"/>
             <a:r>
-              <a:rPr lang="en-US" smtClean="0"/>
+              <a:rPr lang="en-US"/>
               <a:t>Fourth level</a:t>
             </a:r>
           </a:p>
           <a:p>
             <a:pPr lvl="4"/>
             <a:r>
-              <a:rPr lang="en-US" smtClean="0"/>
+              <a:rPr lang="en-US"/>
               <a:t>Fifth level</a:t>
             </a:r>
-            <a:endParaRPr lang="en-US"/>
           </a:p>
         </p:txBody>
       </p:sp>
@@ -2728,7 +2723,7 @@
           <a:p>
             <a:fld id="{5BCAD085-E8A6-8845-BD4E-CB4CCA059FC4}" type="datetimeFigureOut">
               <a:rPr lang="en-US" smtClean="0"/>
-              <a:t>1/27/13</a:t>
+              <a:t>3/19/2026</a:t>
             </a:fld>
             <a:endParaRPr lang="en-US"/>
           </a:p>
@@ -3087,7 +3082,7 @@
 </file>
 
 <file path=ppt/slides/slide1.xml><?xml version="1.0" encoding="utf-8"?>
-<p:sld xmlns:a="http://schemas.openxmlformats.org/drawingml/2006/main" xmlns:p="http://schemas.openxmlformats.org/presentationml/2006/main" xmlns:r="http://schemas.openxmlformats.org/officeDocument/2006/relationships">
+<p:sld xmlns:a="http://schemas.openxmlformats.org/drawingml/2006/main" xmlns:r="http://schemas.openxmlformats.org/officeDocument/2006/relationships" xmlns:p="http://schemas.openxmlformats.org/presentationml/2006/main">
   <p:cSld>
     <p:bg>
       <p:bgPr>
@@ -3103,7 +3098,14 @@
         <p:cNvGrpSpPr/>
         <p:nvPr/>
       </p:nvGrpSpPr>
-      <p:grpSpPr/>
+      <p:grpSpPr>
+        <a:xfrm>
+          <a:off x="0" y="0"/>
+          <a:ext cx="0" cy="0"/>
+          <a:chOff x="0" y="0"/>
+          <a:chExt cx="0" cy="0"/>
+        </a:xfrm>
+      </p:grpSpPr>
       <p:sp>
         <p:nvSpPr>
           <p:cNvPr id="2" name="Rectangle 1"/>
@@ -3144,6 +3146,7 @@
           <a:lstStyle/>
           <a:p>
             <a:pPr algn="ctr"/>
+            <a:endParaRPr/>
           </a:p>
         </p:txBody>
       </p:sp>
@@ -3187,6 +3190,7 @@
           <a:lstStyle/>
           <a:p>
             <a:pPr algn="ctr"/>
+            <a:endParaRPr/>
           </a:p>
         </p:txBody>
       </p:sp>
@@ -3230,6 +3234,7 @@
           <a:lstStyle/>
           <a:p>
             <a:pPr algn="ctr"/>
+            <a:endParaRPr/>
           </a:p>
         </p:txBody>
       </p:sp>
@@ -3347,8 +3352,8 @@
         </p:nvSpPr>
         <p:spPr>
           <a:xfrm>
-            <a:off x="8988552" y="1828800"/>
-            <a:ext cx="2743200" cy="1645920"/>
+            <a:off x="731519" y="5617464"/>
+            <a:ext cx="3312523" cy="507831"/>
           </a:xfrm>
           <a:prstGeom prst="rect">
             <a:avLst/>
@@ -3367,13 +3372,13 @@
               </a:spcAft>
             </a:pPr>
             <a:r>
-              <a:rPr sz="1100" b="0">
+              <a:rPr lang="en-US" sz="1100" b="0" dirty="0">
                 <a:solidFill>
                   <a:srgbClr val="FFFFFF"/>
                 </a:solidFill>
                 <a:latin typeface="Courier New"/>
               </a:rPr>
-              <a:t>Student : Dorothy</a:t>
+              <a:t>Truong Anh Dao Nguyen</a:t>
             </a:r>
           </a:p>
           <a:p>
@@ -3383,30 +3388,20 @@
               </a:spcAft>
             </a:pPr>
             <a:r>
-              <a:rPr sz="1100" b="0">
+              <a:rPr lang="en-US" sz="1100" b="0" dirty="0">
                 <a:solidFill>
                   <a:srgbClr val="FFFFFF"/>
                 </a:solidFill>
                 <a:latin typeface="Courier New"/>
               </a:rPr>
-              <a:t>Date    : March 19, 2026</a:t>
-            </a:r>
-          </a:p>
-          <a:p>
-            <a:pPr algn="l">
-              <a:spcAft>
-                <a:spcPts val="600"/>
-              </a:spcAft>
-            </a:pPr>
-            <a:r>
-              <a:rPr sz="1100" b="0">
-                <a:solidFill>
-                  <a:srgbClr val="FFFFFF"/>
-                </a:solidFill>
-                <a:latin typeface="Courier New"/>
-              </a:rPr>
-              <a:t>Model   : Vanilla RNN (NumPy)</a:t>
-            </a:r>
+              <a:t>Gavin Higgins</a:t>
+            </a:r>
+            <a:endParaRPr sz="1100" b="0" dirty="0">
+              <a:solidFill>
+                <a:srgbClr val="FFFFFF"/>
+              </a:solidFill>
+              <a:latin typeface="Courier New"/>
+            </a:endParaRPr>
           </a:p>
         </p:txBody>
       </p:sp>
@@ -3419,7 +3414,7 @@
 </file>
 
 <file path=ppt/slides/slide2.xml><?xml version="1.0" encoding="utf-8"?>
-<p:sld xmlns:a="http://schemas.openxmlformats.org/drawingml/2006/main" xmlns:p="http://schemas.openxmlformats.org/presentationml/2006/main" xmlns:r="http://schemas.openxmlformats.org/officeDocument/2006/relationships">
+<p:sld xmlns:a="http://schemas.openxmlformats.org/drawingml/2006/main" xmlns:r="http://schemas.openxmlformats.org/officeDocument/2006/relationships" xmlns:p="http://schemas.openxmlformats.org/presentationml/2006/main">
   <p:cSld>
     <p:bg>
       <p:bgPr>
@@ -3435,7 +3430,14 @@
         <p:cNvGrpSpPr/>
         <p:nvPr/>
       </p:nvGrpSpPr>
-      <p:grpSpPr/>
+      <p:grpSpPr>
+        <a:xfrm>
+          <a:off x="0" y="0"/>
+          <a:ext cx="0" cy="0"/>
+          <a:chOff x="0" y="0"/>
+          <a:chExt cx="0" cy="0"/>
+        </a:xfrm>
+      </p:grpSpPr>
       <p:sp>
         <p:nvSpPr>
           <p:cNvPr id="2" name="Rectangle 1"/>
@@ -3476,6 +3478,7 @@
           <a:lstStyle/>
           <a:p>
             <a:pPr algn="ctr"/>
+            <a:endParaRPr/>
           </a:p>
         </p:txBody>
       </p:sp>
@@ -3554,6 +3557,7 @@
           <a:lstStyle/>
           <a:p>
             <a:pPr algn="ctr"/>
+            <a:endParaRPr/>
           </a:p>
         </p:txBody>
       </p:sp>
@@ -3597,6 +3601,7 @@
           <a:lstStyle/>
           <a:p>
             <a:pPr algn="ctr"/>
+            <a:endParaRPr/>
           </a:p>
         </p:txBody>
       </p:sp>
@@ -3745,6 +3750,7 @@
           <a:lstStyle/>
           <a:p>
             <a:pPr algn="ctr"/>
+            <a:endParaRPr/>
           </a:p>
         </p:txBody>
       </p:sp>
@@ -3788,6 +3794,7 @@
           <a:lstStyle/>
           <a:p>
             <a:pPr algn="ctr"/>
+            <a:endParaRPr/>
           </a:p>
         </p:txBody>
       </p:sp>
@@ -3936,6 +3943,7 @@
           <a:lstStyle/>
           <a:p>
             <a:pPr algn="ctr"/>
+            <a:endParaRPr/>
           </a:p>
         </p:txBody>
       </p:sp>
@@ -3979,6 +3987,7 @@
           <a:lstStyle/>
           <a:p>
             <a:pPr algn="ctr"/>
+            <a:endParaRPr/>
           </a:p>
         </p:txBody>
       </p:sp>
@@ -4127,6 +4136,7 @@
           <a:lstStyle/>
           <a:p>
             <a:pPr algn="ctr"/>
+            <a:endParaRPr/>
           </a:p>
         </p:txBody>
       </p:sp>
@@ -4170,6 +4180,7 @@
           <a:lstStyle/>
           <a:p>
             <a:pPr algn="ctr"/>
+            <a:endParaRPr/>
           </a:p>
         </p:txBody>
       </p:sp>
@@ -4318,6 +4329,7 @@
           <a:lstStyle/>
           <a:p>
             <a:pPr algn="ctr"/>
+            <a:endParaRPr/>
           </a:p>
         </p:txBody>
       </p:sp>
@@ -4361,6 +4373,7 @@
           <a:lstStyle/>
           <a:p>
             <a:pPr algn="ctr"/>
+            <a:endParaRPr/>
           </a:p>
         </p:txBody>
       </p:sp>
@@ -4509,6 +4522,7 @@
           <a:lstStyle/>
           <a:p>
             <a:pPr algn="ctr"/>
+            <a:endParaRPr/>
           </a:p>
         </p:txBody>
       </p:sp>
@@ -4552,6 +4566,7 @@
           <a:lstStyle/>
           <a:p>
             <a:pPr algn="ctr"/>
+            <a:endParaRPr/>
           </a:p>
         </p:txBody>
       </p:sp>
@@ -4669,7 +4684,7 @@
 </file>
 
 <file path=ppt/slides/slide3.xml><?xml version="1.0" encoding="utf-8"?>
-<p:sld xmlns:a="http://schemas.openxmlformats.org/drawingml/2006/main" xmlns:p="http://schemas.openxmlformats.org/presentationml/2006/main" xmlns:r="http://schemas.openxmlformats.org/officeDocument/2006/relationships">
+<p:sld xmlns:a="http://schemas.openxmlformats.org/drawingml/2006/main" xmlns:r="http://schemas.openxmlformats.org/officeDocument/2006/relationships" xmlns:p="http://schemas.openxmlformats.org/presentationml/2006/main">
   <p:cSld>
     <p:bg>
       <p:bgPr>
@@ -4685,7 +4700,14 @@
         <p:cNvGrpSpPr/>
         <p:nvPr/>
       </p:nvGrpSpPr>
-      <p:grpSpPr/>
+      <p:grpSpPr>
+        <a:xfrm>
+          <a:off x="0" y="0"/>
+          <a:ext cx="0" cy="0"/>
+          <a:chOff x="0" y="0"/>
+          <a:chExt cx="0" cy="0"/>
+        </a:xfrm>
+      </p:grpSpPr>
       <p:sp>
         <p:nvSpPr>
           <p:cNvPr id="2" name="Rectangle 1"/>
@@ -4726,6 +4748,7 @@
           <a:lstStyle/>
           <a:p>
             <a:pPr algn="ctr"/>
+            <a:endParaRPr/>
           </a:p>
         </p:txBody>
       </p:sp>
@@ -4804,6 +4827,7 @@
           <a:lstStyle/>
           <a:p>
             <a:pPr algn="ctr"/>
+            <a:endParaRPr/>
           </a:p>
         </p:txBody>
       </p:sp>
@@ -5442,6 +5466,7 @@
           <a:lstStyle/>
           <a:p>
             <a:pPr algn="ctr"/>
+            <a:endParaRPr/>
           </a:p>
         </p:txBody>
       </p:sp>
@@ -5874,7 +5899,7 @@
 </file>
 
 <file path=ppt/slides/slide4.xml><?xml version="1.0" encoding="utf-8"?>
-<p:sld xmlns:a="http://schemas.openxmlformats.org/drawingml/2006/main" xmlns:p="http://schemas.openxmlformats.org/presentationml/2006/main" xmlns:r="http://schemas.openxmlformats.org/officeDocument/2006/relationships">
+<p:sld xmlns:a="http://schemas.openxmlformats.org/drawingml/2006/main" xmlns:r="http://schemas.openxmlformats.org/officeDocument/2006/relationships" xmlns:p="http://schemas.openxmlformats.org/presentationml/2006/main">
   <p:cSld>
     <p:bg>
       <p:bgPr>
@@ -5890,7 +5915,14 @@
         <p:cNvGrpSpPr/>
         <p:nvPr/>
       </p:nvGrpSpPr>
-      <p:grpSpPr/>
+      <p:grpSpPr>
+        <a:xfrm>
+          <a:off x="0" y="0"/>
+          <a:ext cx="0" cy="0"/>
+          <a:chOff x="0" y="0"/>
+          <a:chExt cx="0" cy="0"/>
+        </a:xfrm>
+      </p:grpSpPr>
       <p:sp>
         <p:nvSpPr>
           <p:cNvPr id="2" name="Rectangle 1"/>
@@ -5931,6 +5963,7 @@
           <a:lstStyle/>
           <a:p>
             <a:pPr algn="ctr"/>
+            <a:endParaRPr/>
           </a:p>
         </p:txBody>
       </p:sp>
@@ -6009,6 +6042,7 @@
           <a:lstStyle/>
           <a:p>
             <a:pPr algn="ctr"/>
+            <a:endParaRPr/>
           </a:p>
         </p:txBody>
       </p:sp>
@@ -6052,6 +6086,7 @@
           <a:lstStyle/>
           <a:p>
             <a:pPr algn="ctr"/>
+            <a:endParaRPr/>
           </a:p>
         </p:txBody>
       </p:sp>
@@ -6167,6 +6202,7 @@
           <a:lstStyle/>
           <a:p>
             <a:pPr algn="ctr"/>
+            <a:endParaRPr/>
           </a:p>
         </p:txBody>
       </p:sp>
@@ -6210,6 +6246,7 @@
           <a:lstStyle/>
           <a:p>
             <a:pPr algn="ctr"/>
+            <a:endParaRPr/>
           </a:p>
         </p:txBody>
       </p:sp>
@@ -6326,6 +6363,7 @@
           <a:lstStyle/>
           <a:p>
             <a:pPr algn="ctr"/>
+            <a:endParaRPr/>
           </a:p>
         </p:txBody>
       </p:sp>
@@ -6369,6 +6407,7 @@
           <a:lstStyle/>
           <a:p>
             <a:pPr algn="ctr"/>
+            <a:endParaRPr/>
           </a:p>
         </p:txBody>
       </p:sp>
@@ -6485,6 +6524,7 @@
           <a:lstStyle/>
           <a:p>
             <a:pPr algn="ctr"/>
+            <a:endParaRPr/>
           </a:p>
         </p:txBody>
       </p:sp>
@@ -6563,6 +6603,7 @@
           <a:lstStyle/>
           <a:p>
             <a:pPr algn="ctr"/>
+            <a:endParaRPr/>
           </a:p>
         </p:txBody>
       </p:sp>
@@ -6712,6 +6753,7 @@
           <a:lstStyle/>
           <a:p>
             <a:pPr algn="ctr"/>
+            <a:endParaRPr/>
           </a:p>
         </p:txBody>
       </p:sp>
@@ -6861,6 +6903,7 @@
           <a:lstStyle/>
           <a:p>
             <a:pPr algn="ctr"/>
+            <a:endParaRPr/>
           </a:p>
         </p:txBody>
       </p:sp>
@@ -7009,6 +7052,7 @@
           <a:lstStyle/>
           <a:p>
             <a:pPr algn="ctr"/>
+            <a:endParaRPr/>
           </a:p>
         </p:txBody>
       </p:sp>
@@ -7157,6 +7201,7 @@
           <a:lstStyle/>
           <a:p>
             <a:pPr algn="ctr"/>
+            <a:endParaRPr/>
           </a:p>
         </p:txBody>
       </p:sp>
@@ -7274,7 +7319,7 @@
 </file>
 
 <file path=ppt/slides/slide5.xml><?xml version="1.0" encoding="utf-8"?>
-<p:sld xmlns:a="http://schemas.openxmlformats.org/drawingml/2006/main" xmlns:p="http://schemas.openxmlformats.org/presentationml/2006/main" xmlns:r="http://schemas.openxmlformats.org/officeDocument/2006/relationships">
+<p:sld xmlns:a="http://schemas.openxmlformats.org/drawingml/2006/main" xmlns:r="http://schemas.openxmlformats.org/officeDocument/2006/relationships" xmlns:p="http://schemas.openxmlformats.org/presentationml/2006/main">
   <p:cSld>
     <p:bg>
       <p:bgPr>
@@ -7290,7 +7335,14 @@
         <p:cNvGrpSpPr/>
         <p:nvPr/>
       </p:nvGrpSpPr>
-      <p:grpSpPr/>
+      <p:grpSpPr>
+        <a:xfrm>
+          <a:off x="0" y="0"/>
+          <a:ext cx="0" cy="0"/>
+          <a:chOff x="0" y="0"/>
+          <a:chExt cx="0" cy="0"/>
+        </a:xfrm>
+      </p:grpSpPr>
       <p:sp>
         <p:nvSpPr>
           <p:cNvPr id="2" name="Rectangle 1"/>
@@ -7331,6 +7383,7 @@
           <a:lstStyle/>
           <a:p>
             <a:pPr algn="ctr"/>
+            <a:endParaRPr/>
           </a:p>
         </p:txBody>
       </p:sp>
@@ -7409,6 +7462,7 @@
           <a:lstStyle/>
           <a:p>
             <a:pPr algn="ctr"/>
+            <a:endParaRPr/>
           </a:p>
         </p:txBody>
       </p:sp>
@@ -7506,15 +7560,12 @@
                 <a:spcPts val="600"/>
               </a:spcAft>
             </a:pPr>
-            <a:r>
-              <a:rPr sz="1200" b="0">
-                <a:solidFill>
-                  <a:srgbClr val="02C39A"/>
-                </a:solidFill>
-                <a:latin typeface="Courier New"/>
-              </a:rPr>
-              <a:t/>
-            </a:r>
+            <a:endParaRPr sz="1200" b="0">
+              <a:solidFill>
+                <a:srgbClr val="02C39A"/>
+              </a:solidFill>
+              <a:latin typeface="Courier New"/>
+            </a:endParaRPr>
           </a:p>
           <a:p>
             <a:pPr algn="l">
@@ -7538,15 +7589,12 @@
                 <a:spcPts val="600"/>
               </a:spcAft>
             </a:pPr>
-            <a:r>
-              <a:rPr sz="1200" b="0">
-                <a:solidFill>
-                  <a:srgbClr val="02C39A"/>
-                </a:solidFill>
-                <a:latin typeface="Courier New"/>
-              </a:rPr>
-              <a:t/>
-            </a:r>
+            <a:endParaRPr sz="1200" b="0">
+              <a:solidFill>
+                <a:srgbClr val="02C39A"/>
+              </a:solidFill>
+              <a:latin typeface="Courier New"/>
+            </a:endParaRPr>
           </a:p>
           <a:p>
             <a:pPr algn="l">
@@ -8093,6 +8141,7 @@
           <a:lstStyle/>
           <a:p>
             <a:pPr algn="ctr"/>
+            <a:endParaRPr/>
           </a:p>
         </p:txBody>
       </p:sp>
@@ -8171,6 +8220,7 @@
           <a:lstStyle/>
           <a:p>
             <a:pPr algn="ctr"/>
+            <a:endParaRPr/>
           </a:p>
         </p:txBody>
       </p:sp>
@@ -8284,6 +8334,7 @@
           <a:lstStyle/>
           <a:p>
             <a:pPr algn="ctr"/>
+            <a:endParaRPr/>
           </a:p>
         </p:txBody>
       </p:sp>
@@ -8397,6 +8448,7 @@
           <a:lstStyle/>
           <a:p>
             <a:pPr algn="ctr"/>
+            <a:endParaRPr/>
           </a:p>
         </p:txBody>
       </p:sp>
@@ -8510,6 +8562,7 @@
           <a:lstStyle/>
           <a:p>
             <a:pPr algn="ctr"/>
+            <a:endParaRPr/>
           </a:p>
         </p:txBody>
       </p:sp>
@@ -8623,6 +8676,7 @@
           <a:lstStyle/>
           <a:p>
             <a:pPr algn="ctr"/>
+            <a:endParaRPr/>
           </a:p>
         </p:txBody>
       </p:sp>
@@ -8736,6 +8790,7 @@
           <a:lstStyle/>
           <a:p>
             <a:pPr algn="ctr"/>
+            <a:endParaRPr/>
           </a:p>
         </p:txBody>
       </p:sp>
@@ -8849,6 +8904,7 @@
           <a:lstStyle/>
           <a:p>
             <a:pPr algn="ctr"/>
+            <a:endParaRPr/>
           </a:p>
         </p:txBody>
       </p:sp>
@@ -8962,6 +9018,7 @@
           <a:lstStyle/>
           <a:p>
             <a:pPr algn="ctr"/>
+            <a:endParaRPr/>
           </a:p>
         </p:txBody>
       </p:sp>
@@ -9075,6 +9132,7 @@
           <a:lstStyle/>
           <a:p>
             <a:pPr algn="ctr"/>
+            <a:endParaRPr/>
           </a:p>
         </p:txBody>
       </p:sp>
@@ -9188,6 +9246,7 @@
           <a:lstStyle/>
           <a:p>
             <a:pPr algn="ctr"/>
+            <a:endParaRPr/>
           </a:p>
         </p:txBody>
       </p:sp>
@@ -9270,7 +9329,7 @@
 </file>
 
 <file path=ppt/slides/slide6.xml><?xml version="1.0" encoding="utf-8"?>
-<p:sld xmlns:a="http://schemas.openxmlformats.org/drawingml/2006/main" xmlns:p="http://schemas.openxmlformats.org/presentationml/2006/main" xmlns:r="http://schemas.openxmlformats.org/officeDocument/2006/relationships">
+<p:sld xmlns:a="http://schemas.openxmlformats.org/drawingml/2006/main" xmlns:r="http://schemas.openxmlformats.org/officeDocument/2006/relationships" xmlns:p="http://schemas.openxmlformats.org/presentationml/2006/main">
   <p:cSld>
     <p:bg>
       <p:bgPr>
@@ -9286,7 +9345,14 @@
         <p:cNvGrpSpPr/>
         <p:nvPr/>
       </p:nvGrpSpPr>
-      <p:grpSpPr/>
+      <p:grpSpPr>
+        <a:xfrm>
+          <a:off x="0" y="0"/>
+          <a:ext cx="0" cy="0"/>
+          <a:chOff x="0" y="0"/>
+          <a:chExt cx="0" cy="0"/>
+        </a:xfrm>
+      </p:grpSpPr>
       <p:sp>
         <p:nvSpPr>
           <p:cNvPr id="2" name="Rectangle 1"/>
@@ -9327,6 +9393,7 @@
           <a:lstStyle/>
           <a:p>
             <a:pPr algn="ctr"/>
+            <a:endParaRPr/>
           </a:p>
         </p:txBody>
       </p:sp>
@@ -9405,6 +9472,7 @@
           <a:lstStyle/>
           <a:p>
             <a:pPr algn="ctr"/>
+            <a:endParaRPr/>
           </a:p>
         </p:txBody>
       </p:sp>
@@ -9518,6 +9586,7 @@
           <a:lstStyle/>
           <a:p>
             <a:pPr algn="ctr"/>
+            <a:endParaRPr/>
           </a:p>
         </p:txBody>
       </p:sp>
@@ -9631,6 +9700,7 @@
           <a:lstStyle/>
           <a:p>
             <a:pPr algn="ctr"/>
+            <a:endParaRPr/>
           </a:p>
         </p:txBody>
       </p:sp>
@@ -9744,6 +9814,7 @@
           <a:lstStyle/>
           <a:p>
             <a:pPr algn="ctr"/>
+            <a:endParaRPr/>
           </a:p>
         </p:txBody>
       </p:sp>
@@ -9885,7 +9956,7 @@
 </file>
 
 <file path=ppt/slides/slide7.xml><?xml version="1.0" encoding="utf-8"?>
-<p:sld xmlns:a="http://schemas.openxmlformats.org/drawingml/2006/main" xmlns:p="http://schemas.openxmlformats.org/presentationml/2006/main" xmlns:r="http://schemas.openxmlformats.org/officeDocument/2006/relationships">
+<p:sld xmlns:a="http://schemas.openxmlformats.org/drawingml/2006/main" xmlns:r="http://schemas.openxmlformats.org/officeDocument/2006/relationships" xmlns:p="http://schemas.openxmlformats.org/presentationml/2006/main">
   <p:cSld>
     <p:bg>
       <p:bgPr>
@@ -9901,7 +9972,14 @@
         <p:cNvGrpSpPr/>
         <p:nvPr/>
       </p:nvGrpSpPr>
-      <p:grpSpPr/>
+      <p:grpSpPr>
+        <a:xfrm>
+          <a:off x="0" y="0"/>
+          <a:ext cx="0" cy="0"/>
+          <a:chOff x="0" y="0"/>
+          <a:chExt cx="0" cy="0"/>
+        </a:xfrm>
+      </p:grpSpPr>
       <p:sp>
         <p:nvSpPr>
           <p:cNvPr id="2" name="Rectangle 1"/>
@@ -9942,6 +10020,7 @@
           <a:lstStyle/>
           <a:p>
             <a:pPr algn="ctr"/>
+            <a:endParaRPr/>
           </a:p>
         </p:txBody>
       </p:sp>
@@ -10020,6 +10099,7 @@
           <a:lstStyle/>
           <a:p>
             <a:pPr algn="ctr"/>
+            <a:endParaRPr/>
           </a:p>
         </p:txBody>
       </p:sp>
@@ -10169,6 +10249,7 @@
           <a:lstStyle/>
           <a:p>
             <a:pPr algn="ctr"/>
+            <a:endParaRPr/>
           </a:p>
         </p:txBody>
       </p:sp>
@@ -10318,6 +10399,7 @@
           <a:lstStyle/>
           <a:p>
             <a:pPr algn="ctr"/>
+            <a:endParaRPr/>
           </a:p>
         </p:txBody>
       </p:sp>
@@ -10491,6 +10573,7 @@
           <a:lstStyle/>
           <a:p>
             <a:pPr algn="ctr"/>
+            <a:endParaRPr/>
           </a:p>
         </p:txBody>
       </p:sp>
@@ -10783,7 +10866,7 @@
 </file>
 
 <file path=ppt/slides/slide8.xml><?xml version="1.0" encoding="utf-8"?>
-<p:sld xmlns:a="http://schemas.openxmlformats.org/drawingml/2006/main" xmlns:p="http://schemas.openxmlformats.org/presentationml/2006/main" xmlns:r="http://schemas.openxmlformats.org/officeDocument/2006/relationships">
+<p:sld xmlns:a="http://schemas.openxmlformats.org/drawingml/2006/main" xmlns:r="http://schemas.openxmlformats.org/officeDocument/2006/relationships" xmlns:p="http://schemas.openxmlformats.org/presentationml/2006/main">
   <p:cSld>
     <p:bg>
       <p:bgPr>
@@ -10799,7 +10882,14 @@
         <p:cNvGrpSpPr/>
         <p:nvPr/>
       </p:nvGrpSpPr>
-      <p:grpSpPr/>
+      <p:grpSpPr>
+        <a:xfrm>
+          <a:off x="0" y="0"/>
+          <a:ext cx="0" cy="0"/>
+          <a:chOff x="0" y="0"/>
+          <a:chExt cx="0" cy="0"/>
+        </a:xfrm>
+      </p:grpSpPr>
       <p:sp>
         <p:nvSpPr>
           <p:cNvPr id="2" name="Rectangle 1"/>
@@ -10840,6 +10930,7 @@
           <a:lstStyle/>
           <a:p>
             <a:pPr algn="ctr"/>
+            <a:endParaRPr/>
           </a:p>
         </p:txBody>
       </p:sp>
@@ -10918,6 +11009,7 @@
           <a:lstStyle/>
           <a:p>
             <a:pPr algn="ctr"/>
+            <a:endParaRPr/>
           </a:p>
         </p:txBody>
       </p:sp>
@@ -10961,6 +11053,7 @@
           <a:lstStyle/>
           <a:p>
             <a:pPr algn="ctr"/>
+            <a:endParaRPr/>
           </a:p>
         </p:txBody>
       </p:sp>
@@ -11323,6 +11416,7 @@
           <a:lstStyle/>
           <a:p>
             <a:pPr algn="ctr"/>
+            <a:endParaRPr/>
           </a:p>
         </p:txBody>
       </p:sp>
@@ -11401,6 +11495,7 @@
           <a:lstStyle/>
           <a:p>
             <a:pPr algn="ctr"/>
+            <a:endParaRPr/>
           </a:p>
         </p:txBody>
       </p:sp>
@@ -11515,6 +11610,7 @@
           <a:lstStyle/>
           <a:p>
             <a:pPr algn="ctr"/>
+            <a:endParaRPr/>
           </a:p>
         </p:txBody>
       </p:sp>
@@ -11629,6 +11725,7 @@
           <a:lstStyle/>
           <a:p>
             <a:pPr algn="ctr"/>
+            <a:endParaRPr/>
           </a:p>
         </p:txBody>
       </p:sp>
@@ -11743,6 +11840,7 @@
           <a:lstStyle/>
           <a:p>
             <a:pPr algn="ctr"/>
+            <a:endParaRPr/>
           </a:p>
         </p:txBody>
       </p:sp>
@@ -11857,6 +11955,7 @@
           <a:lstStyle/>
           <a:p>
             <a:pPr algn="ctr"/>
+            <a:endParaRPr/>
           </a:p>
         </p:txBody>
       </p:sp>
@@ -11939,7 +12038,7 @@
 </file>
 
 <file path=ppt/slides/slide9.xml><?xml version="1.0" encoding="utf-8"?>
-<p:sld xmlns:a="http://schemas.openxmlformats.org/drawingml/2006/main" xmlns:p="http://schemas.openxmlformats.org/presentationml/2006/main" xmlns:r="http://schemas.openxmlformats.org/officeDocument/2006/relationships">
+<p:sld xmlns:a="http://schemas.openxmlformats.org/drawingml/2006/main" xmlns:r="http://schemas.openxmlformats.org/officeDocument/2006/relationships" xmlns:p="http://schemas.openxmlformats.org/presentationml/2006/main">
   <p:cSld>
     <p:bg>
       <p:bgPr>
@@ -11955,7 +12054,14 @@
         <p:cNvGrpSpPr/>
         <p:nvPr/>
       </p:nvGrpSpPr>
-      <p:grpSpPr/>
+      <p:grpSpPr>
+        <a:xfrm>
+          <a:off x="0" y="0"/>
+          <a:ext cx="0" cy="0"/>
+          <a:chOff x="0" y="0"/>
+          <a:chExt cx="0" cy="0"/>
+        </a:xfrm>
+      </p:grpSpPr>
       <p:sp>
         <p:nvSpPr>
           <p:cNvPr id="2" name="Rectangle 1"/>
@@ -11996,6 +12102,7 @@
           <a:lstStyle/>
           <a:p>
             <a:pPr algn="ctr"/>
+            <a:endParaRPr/>
           </a:p>
         </p:txBody>
       </p:sp>
@@ -12074,6 +12181,7 @@
           <a:lstStyle/>
           <a:p>
             <a:pPr algn="ctr"/>
+            <a:endParaRPr/>
           </a:p>
         </p:txBody>
       </p:sp>
@@ -12152,6 +12260,7 @@
           <a:lstStyle/>
           <a:p>
             <a:pPr algn="ctr"/>
+            <a:endParaRPr/>
           </a:p>
         </p:txBody>
       </p:sp>
@@ -12265,6 +12374,7 @@
           <a:lstStyle/>
           <a:p>
             <a:pPr algn="ctr"/>
+            <a:endParaRPr/>
           </a:p>
         </p:txBody>
       </p:sp>
@@ -12378,6 +12488,7 @@
           <a:lstStyle/>
           <a:p>
             <a:pPr algn="ctr"/>
+            <a:endParaRPr/>
           </a:p>
         </p:txBody>
       </p:sp>
@@ -12491,6 +12602,7 @@
           <a:lstStyle/>
           <a:p>
             <a:pPr algn="ctr"/>
+            <a:endParaRPr/>
           </a:p>
         </p:txBody>
       </p:sp>
@@ -12604,6 +12716,7 @@
           <a:lstStyle/>
           <a:p>
             <a:pPr algn="ctr"/>
+            <a:endParaRPr/>
           </a:p>
         </p:txBody>
       </p:sp>
@@ -12717,6 +12830,7 @@
           <a:lstStyle/>
           <a:p>
             <a:pPr algn="ctr"/>
+            <a:endParaRPr/>
           </a:p>
         </p:txBody>
       </p:sp>
